--- a/Update_Masterarbeit_Max.pptx
+++ b/Update_Masterarbeit_Max.pptx
@@ -19,8 +19,7 @@
     <p:sldId id="275" r:id="rId13"/>
     <p:sldId id="267" r:id="rId14"/>
     <p:sldId id="265" r:id="rId15"/>
-    <p:sldId id="273" r:id="rId16"/>
-    <p:sldId id="274" r:id="rId17"/>
+    <p:sldId id="274" r:id="rId16"/>
   </p:sldIdLst>
   <p:sldSz cx="9144000" cy="6858000" type="screen4x3"/>
   <p:notesSz cx="6858000" cy="9144000"/>
@@ -317,7 +316,7 @@
           <a:p>
             <a:fld id="{5BCAD085-E8A6-8845-BD4E-CB4CCA059FC4}" type="datetimeFigureOut">
               <a:rPr lang="en-US" smtClean="0"/>
-              <a:t>4/14/2026</a:t>
+              <a:t>4/15/2026</a:t>
             </a:fld>
             <a:endParaRPr lang="en-US"/>
           </a:p>
@@ -485,7 +484,7 @@
           <a:p>
             <a:fld id="{5BCAD085-E8A6-8845-BD4E-CB4CCA059FC4}" type="datetimeFigureOut">
               <a:rPr lang="en-US" smtClean="0"/>
-              <a:t>4/14/2026</a:t>
+              <a:t>4/15/2026</a:t>
             </a:fld>
             <a:endParaRPr lang="en-US"/>
           </a:p>
@@ -663,7 +662,7 @@
           <a:p>
             <a:fld id="{5BCAD085-E8A6-8845-BD4E-CB4CCA059FC4}" type="datetimeFigureOut">
               <a:rPr lang="en-US" smtClean="0"/>
-              <a:t>4/14/2026</a:t>
+              <a:t>4/15/2026</a:t>
             </a:fld>
             <a:endParaRPr lang="en-US"/>
           </a:p>
@@ -831,7 +830,7 @@
           <a:p>
             <a:fld id="{5BCAD085-E8A6-8845-BD4E-CB4CCA059FC4}" type="datetimeFigureOut">
               <a:rPr lang="en-US" smtClean="0"/>
-              <a:t>4/14/2026</a:t>
+              <a:t>4/15/2026</a:t>
             </a:fld>
             <a:endParaRPr lang="en-US"/>
           </a:p>
@@ -1076,7 +1075,7 @@
           <a:p>
             <a:fld id="{5BCAD085-E8A6-8845-BD4E-CB4CCA059FC4}" type="datetimeFigureOut">
               <a:rPr lang="en-US" smtClean="0"/>
-              <a:t>4/14/2026</a:t>
+              <a:t>4/15/2026</a:t>
             </a:fld>
             <a:endParaRPr lang="en-US"/>
           </a:p>
@@ -1361,7 +1360,7 @@
           <a:p>
             <a:fld id="{5BCAD085-E8A6-8845-BD4E-CB4CCA059FC4}" type="datetimeFigureOut">
               <a:rPr lang="en-US" smtClean="0"/>
-              <a:t>4/14/2026</a:t>
+              <a:t>4/15/2026</a:t>
             </a:fld>
             <a:endParaRPr lang="en-US"/>
           </a:p>
@@ -1780,7 +1779,7 @@
           <a:p>
             <a:fld id="{5BCAD085-E8A6-8845-BD4E-CB4CCA059FC4}" type="datetimeFigureOut">
               <a:rPr lang="en-US" smtClean="0"/>
-              <a:t>4/14/2026</a:t>
+              <a:t>4/15/2026</a:t>
             </a:fld>
             <a:endParaRPr lang="en-US"/>
           </a:p>
@@ -1897,7 +1896,7 @@
           <a:p>
             <a:fld id="{5BCAD085-E8A6-8845-BD4E-CB4CCA059FC4}" type="datetimeFigureOut">
               <a:rPr lang="en-US" smtClean="0"/>
-              <a:t>4/14/2026</a:t>
+              <a:t>4/15/2026</a:t>
             </a:fld>
             <a:endParaRPr lang="en-US"/>
           </a:p>
@@ -1992,7 +1991,7 @@
           <a:p>
             <a:fld id="{5BCAD085-E8A6-8845-BD4E-CB4CCA059FC4}" type="datetimeFigureOut">
               <a:rPr lang="en-US" smtClean="0"/>
-              <a:t>4/14/2026</a:t>
+              <a:t>4/15/2026</a:t>
             </a:fld>
             <a:endParaRPr lang="en-US"/>
           </a:p>
@@ -2267,7 +2266,7 @@
           <a:p>
             <a:fld id="{5BCAD085-E8A6-8845-BD4E-CB4CCA059FC4}" type="datetimeFigureOut">
               <a:rPr lang="en-US" smtClean="0"/>
-              <a:t>4/14/2026</a:t>
+              <a:t>4/15/2026</a:t>
             </a:fld>
             <a:endParaRPr lang="en-US"/>
           </a:p>
@@ -2519,7 +2518,7 @@
           <a:p>
             <a:fld id="{5BCAD085-E8A6-8845-BD4E-CB4CCA059FC4}" type="datetimeFigureOut">
               <a:rPr lang="en-US" smtClean="0"/>
-              <a:t>4/14/2026</a:t>
+              <a:t>4/15/2026</a:t>
             </a:fld>
             <a:endParaRPr lang="en-US"/>
           </a:p>
@@ -2730,7 +2729,7 @@
           <a:p>
             <a:fld id="{5BCAD085-E8A6-8845-BD4E-CB4CCA059FC4}" type="datetimeFigureOut">
               <a:rPr lang="en-US" smtClean="0"/>
-              <a:t>4/14/2026</a:t>
+              <a:t>4/15/2026</a:t>
             </a:fld>
             <a:endParaRPr lang="en-US"/>
           </a:p>
@@ -4047,7 +4046,7 @@
             </a:r>
             <a:r>
               <a:rPr lang="de-DE" dirty="0"/>
-              <a:t>, nur global signifikant</a:t>
+              <a:t>, nur gruppiert und global signifikant</a:t>
             </a:r>
             <a:endParaRPr dirty="0"/>
           </a:p>
@@ -4064,12 +4063,19 @@
               <a:rPr dirty="0" err="1"/>
               <a:t>ergänzend</a:t>
             </a:r>
-            <a:endParaRPr lang="de-DE" dirty="0"/>
-          </a:p>
-          <a:p>
             <a:r>
               <a:rPr lang="de-DE" dirty="0"/>
-              <a:t>Weitere Problematiken: Parameter der Videos, einzelne Taxa, die nicht relevant sind, teilweise fehlende Replikate</a:t>
+              <a:t>, jedoch nicht signifikant</a:t>
+            </a:r>
+          </a:p>
+          <a:p>
+            <a:r>
+              <a:rPr lang="de-DE" dirty="0"/>
+              <a:t>Weitere Probleme: Parameter der Videos, einzelne Taxa, die nicht relevant sind, teilweise fehlende Replikate, z.B. bei </a:t>
+            </a:r>
+            <a:r>
+              <a:rPr lang="de-DE" dirty="0" err="1"/>
+              <a:t>fishmix</a:t>
             </a:r>
             <a:endParaRPr dirty="0"/>
           </a:p>
@@ -4084,111 +4090,6 @@
 </file>
 
 <file path=ppt/slides/slide15.xml><?xml version="1.0" encoding="utf-8"?>
-<p:sld xmlns:a="http://schemas.openxmlformats.org/drawingml/2006/main" xmlns:r="http://schemas.openxmlformats.org/officeDocument/2006/relationships" xmlns:p="http://schemas.openxmlformats.org/presentationml/2006/main">
-  <p:cSld>
-    <p:spTree>
-      <p:nvGrpSpPr>
-        <p:cNvPr id="1" name="">
-          <a:extLst>
-            <a:ext uri="{FF2B5EF4-FFF2-40B4-BE49-F238E27FC236}">
-              <a16:creationId xmlns:a16="http://schemas.microsoft.com/office/drawing/2014/main" id="{5973E896-2B15-1153-C216-4821650EDA10}"/>
-            </a:ext>
-          </a:extLst>
-        </p:cNvPr>
-        <p:cNvGrpSpPr/>
-        <p:nvPr/>
-      </p:nvGrpSpPr>
-      <p:grpSpPr>
-        <a:xfrm>
-          <a:off x="0" y="0"/>
-          <a:ext cx="0" cy="0"/>
-          <a:chOff x="0" y="0"/>
-          <a:chExt cx="0" cy="0"/>
-        </a:xfrm>
-      </p:grpSpPr>
-      <p:sp>
-        <p:nvSpPr>
-          <p:cNvPr id="2" name="Title 1">
-            <a:extLst>
-              <a:ext uri="{FF2B5EF4-FFF2-40B4-BE49-F238E27FC236}">
-                <a16:creationId xmlns:a16="http://schemas.microsoft.com/office/drawing/2014/main" id="{07B76554-FC2A-B888-9B89-1999C12DA362}"/>
-              </a:ext>
-            </a:extLst>
-          </p:cNvPr>
-          <p:cNvSpPr>
-            <a:spLocks noGrp="1"/>
-          </p:cNvSpPr>
-          <p:nvPr>
-            <p:ph type="title"/>
-          </p:nvPr>
-        </p:nvSpPr>
-        <p:spPr/>
-        <p:txBody>
-          <a:bodyPr/>
-          <a:lstStyle/>
-          <a:p>
-            <a:r>
-              <a:t>Methoden</a:t>
-            </a:r>
-          </a:p>
-        </p:txBody>
-      </p:sp>
-      <p:sp>
-        <p:nvSpPr>
-          <p:cNvPr id="3" name="Content Placeholder 2">
-            <a:extLst>
-              <a:ext uri="{FF2B5EF4-FFF2-40B4-BE49-F238E27FC236}">
-                <a16:creationId xmlns:a16="http://schemas.microsoft.com/office/drawing/2014/main" id="{F4A5D117-4624-F2F6-8F3E-42A345522225}"/>
-              </a:ext>
-            </a:extLst>
-          </p:cNvPr>
-          <p:cNvSpPr>
-            <a:spLocks noGrp="1"/>
-          </p:cNvSpPr>
-          <p:nvPr>
-            <p:ph idx="1"/>
-          </p:nvPr>
-        </p:nvSpPr>
-        <p:spPr/>
-        <p:txBody>
-          <a:bodyPr/>
-          <a:lstStyle/>
-          <a:p>
-            <a:r>
-              <a:t>Kruskal-Wallis + Holm</a:t>
-            </a:r>
-          </a:p>
-          <a:p>
-            <a:r>
-              <a:t>Mann-Whitney-U</a:t>
-            </a:r>
-          </a:p>
-          <a:p>
-            <a:r>
-              <a:t>PERMANOVA + Jaccard</a:t>
-            </a:r>
-          </a:p>
-          <a:p>
-            <a:r>
-              <a:t>Korrelationen &amp; Sensitivitätsanalysen</a:t>
-            </a:r>
-          </a:p>
-        </p:txBody>
-      </p:sp>
-    </p:spTree>
-    <p:extLst>
-      <p:ext uri="{BB962C8B-B14F-4D97-AF65-F5344CB8AC3E}">
-        <p14:creationId xmlns:p14="http://schemas.microsoft.com/office/powerpoint/2010/main" val="2730604874"/>
-      </p:ext>
-    </p:extLst>
-  </p:cSld>
-  <p:clrMapOvr>
-    <a:masterClrMapping/>
-  </p:clrMapOvr>
-</p:sld>
-</file>
-
-<file path=ppt/slides/slide16.xml><?xml version="1.0" encoding="utf-8"?>
 <p:sld xmlns:a="http://schemas.openxmlformats.org/drawingml/2006/main" xmlns:r="http://schemas.openxmlformats.org/officeDocument/2006/relationships" xmlns:p="http://schemas.openxmlformats.org/presentationml/2006/main">
   <p:cSld>
     <p:spTree>
@@ -4259,7 +4160,7 @@
         <p:spPr/>
         <p:txBody>
           <a:bodyPr>
-            <a:normAutofit fontScale="55000" lnSpcReduction="20000"/>
+            <a:normAutofit fontScale="47500" lnSpcReduction="20000"/>
           </a:bodyPr>
           <a:lstStyle/>
           <a:p>
@@ -4321,6 +4222,13 @@
           <a:p>
             <a:r>
               <a:rPr lang="de-DE" dirty="0" err="1"/>
+              <a:t>Species-Richness</a:t>
+            </a:r>
+            <a:endParaRPr lang="de-DE" dirty="0"/>
+          </a:p>
+          <a:p>
+            <a:r>
+              <a:rPr lang="de-DE" dirty="0" err="1"/>
               <a:t>Grouper</a:t>
             </a:r>
             <a:r>
@@ -4339,6 +4247,9 @@
               <a:rPr lang="de-DE" dirty="0"/>
               <a:t>Maximaler Köderabstand zu Control </a:t>
             </a:r>
+          </a:p>
+          <a:p>
+            <a:endParaRPr lang="de-DE" dirty="0"/>
           </a:p>
           <a:p>
             <a:r>
@@ -4363,7 +4274,7 @@
                   <a:srgbClr val="FF0000"/>
                 </a:solidFill>
               </a:rPr>
-              <a:t> betrachten?</a:t>
+              <a:t> betrachten</a:t>
             </a:r>
           </a:p>
           <a:p>
@@ -4373,17 +4284,33 @@
                   <a:srgbClr val="FF0000"/>
                 </a:solidFill>
               </a:rPr>
-              <a:t>Parameter z.B. Sicht miteinarbeiten?</a:t>
-            </a:r>
-          </a:p>
-          <a:p>
+              <a:t>Algenköder gruppieren und gegenüber </a:t>
+            </a:r>
+            <a:r>
+              <a:rPr lang="de-DE" dirty="0" err="1">
+                <a:solidFill>
+                  <a:srgbClr val="FF0000"/>
+                </a:solidFill>
+              </a:rPr>
+              <a:t>fishköder</a:t>
+            </a:r>
             <a:r>
               <a:rPr lang="de-DE" dirty="0">
                 <a:solidFill>
                   <a:srgbClr val="FF0000"/>
                 </a:solidFill>
               </a:rPr>
-              <a:t>Konsistenzanalyse zwischen Standorten?</a:t>
+              <a:t> stellen</a:t>
+            </a:r>
+          </a:p>
+          <a:p>
+            <a:r>
+              <a:rPr lang="de-DE" dirty="0">
+                <a:solidFill>
+                  <a:srgbClr val="FF0000"/>
+                </a:solidFill>
+              </a:rPr>
+              <a:t>Parameter z.B. Sicht einarbeiten</a:t>
             </a:r>
           </a:p>
           <a:p>
@@ -4409,7 +4336,7 @@
                   <a:srgbClr val="FF0000"/>
                 </a:solidFill>
               </a:rPr>
-              <a:t>ropes</a:t>
+              <a:t>algae</a:t>
             </a:r>
             <a:r>
               <a:rPr lang="de-DE" dirty="0">
@@ -4417,7 +4344,40 @@
                   <a:srgbClr val="FF0000"/>
                 </a:solidFill>
               </a:rPr>
-              <a:t> vs. Basket?</a:t>
+              <a:t>-strings vs. </a:t>
+            </a:r>
+            <a:r>
+              <a:rPr lang="de-DE" dirty="0" err="1">
+                <a:solidFill>
+                  <a:srgbClr val="FF0000"/>
+                </a:solidFill>
+              </a:rPr>
+              <a:t>basket</a:t>
+            </a:r>
+            <a:endParaRPr lang="de-DE" dirty="0">
+              <a:solidFill>
+                <a:srgbClr val="FF0000"/>
+              </a:solidFill>
+            </a:endParaRPr>
+          </a:p>
+          <a:p>
+            <a:r>
+              <a:rPr lang="de-DE" dirty="0">
+                <a:solidFill>
+                  <a:srgbClr val="FF0000"/>
+                </a:solidFill>
+              </a:rPr>
+              <a:t>Weitere Signifikanztests und Signifikanzkorrekturen</a:t>
+            </a:r>
+          </a:p>
+          <a:p>
+            <a:r>
+              <a:rPr lang="de-DE" dirty="0">
+                <a:solidFill>
+                  <a:srgbClr val="FF0000"/>
+                </a:solidFill>
+              </a:rPr>
+              <a:t>Ideen? </a:t>
             </a:r>
           </a:p>
           <a:p>
@@ -4935,13 +4895,47 @@
           <a:lstStyle/>
           <a:p>
             <a:r>
-              <a:t>Global signifikant (PERMANOVA)</a:t>
-            </a:r>
-          </a:p>
-          <a:p>
-            <a:r>
-              <a:t>Paarweise meist nicht signifikant</a:t>
-            </a:r>
+              <a:rPr dirty="0"/>
+              <a:t>Global </a:t>
+            </a:r>
+            <a:r>
+              <a:rPr dirty="0" err="1"/>
+              <a:t>signifikant</a:t>
+            </a:r>
+            <a:r>
+              <a:rPr dirty="0"/>
+              <a:t> (PERMANOVA)</a:t>
+            </a:r>
+          </a:p>
+          <a:p>
+            <a:r>
+              <a:rPr dirty="0" err="1"/>
+              <a:t>Paarweise</a:t>
+            </a:r>
+            <a:r>
+              <a:rPr dirty="0"/>
+              <a:t> </a:t>
+            </a:r>
+            <a:r>
+              <a:rPr dirty="0" err="1"/>
+              <a:t>meist</a:t>
+            </a:r>
+            <a:r>
+              <a:rPr dirty="0"/>
+              <a:t> nicht </a:t>
+            </a:r>
+            <a:r>
+              <a:rPr dirty="0" err="1"/>
+              <a:t>signifikant</a:t>
+            </a:r>
+            <a:endParaRPr lang="de-DE" dirty="0"/>
+          </a:p>
+          <a:p>
+            <a:r>
+              <a:rPr lang="de-DE" dirty="0"/>
+              <a:t>Fasst man Algen-Köder und Fisch-Köder zusammen immer noch signifikant</a:t>
+            </a:r>
+            <a:endParaRPr dirty="0"/>
           </a:p>
         </p:txBody>
       </p:sp>
